--- a/src/slides/lesson-2-theory.pptx
+++ b/src/slides/lesson-2-theory.pptx
@@ -1312,7 +1312,7 @@
           <a:p>
             <a:r>
               <a:rPr lang="en-US" dirty="0"/>
-              <a:t/>
+              <a:t>- **Zod** is a TypeScript-first schema declaration and validation library</a:t>
             </a:r>
             <a:endParaRPr lang="en-US" dirty="0"/>
           </a:p>
